--- a/skills/beautiful-slides/charts/heatmap/example-playful-marketing.pptx
+++ b/skills/beautiful-slides/charts/heatmap/example-playful-marketing.pptx
@@ -3191,7 +3191,7 @@
             <a:r>
               <a:rPr sz="1300" b="0">
                 <a:solidFill>
-                  <a:srgbClr val="6E6A73"/>
+                  <a:srgbClr val="1B1B1F"/>
                 </a:solidFill>
                 <a:latin typeface="Plus Jakarta Sans"/>
               </a:rPr>
@@ -3226,7 +3226,7 @@
             <a:r>
               <a:rPr sz="1300" b="0">
                 <a:solidFill>
-                  <a:srgbClr val="6E6A73"/>
+                  <a:srgbClr val="1B1B1F"/>
                 </a:solidFill>
                 <a:latin typeface="Plus Jakarta Sans"/>
               </a:rPr>
@@ -3261,7 +3261,7 @@
             <a:r>
               <a:rPr sz="1300" b="0">
                 <a:solidFill>
-                  <a:srgbClr val="6E6A73"/>
+                  <a:srgbClr val="1B1B1F"/>
                 </a:solidFill>
                 <a:latin typeface="Plus Jakarta Sans"/>
               </a:rPr>
@@ -3296,7 +3296,7 @@
             <a:r>
               <a:rPr sz="1300" b="0">
                 <a:solidFill>
-                  <a:srgbClr val="6E6A73"/>
+                  <a:srgbClr val="1B1B1F"/>
                 </a:solidFill>
                 <a:latin typeface="Plus Jakarta Sans"/>
               </a:rPr>
@@ -3331,7 +3331,7 @@
             <a:r>
               <a:rPr sz="1300" b="0">
                 <a:solidFill>
-                  <a:srgbClr val="6E6A73"/>
+                  <a:srgbClr val="1B1B1F"/>
                 </a:solidFill>
                 <a:latin typeface="Plus Jakarta Sans"/>
               </a:rPr>
@@ -3366,7 +3366,7 @@
             <a:r>
               <a:rPr sz="1300" b="0">
                 <a:solidFill>
-                  <a:srgbClr val="6E6A73"/>
+                  <a:srgbClr val="1B1B1F"/>
                 </a:solidFill>
                 <a:latin typeface="Plus Jakarta Sans"/>
               </a:rPr>
@@ -3401,7 +3401,7 @@
             <a:r>
               <a:rPr sz="1300" b="0">
                 <a:solidFill>
-                  <a:srgbClr val="6E6A73"/>
+                  <a:srgbClr val="1B1B1F"/>
                 </a:solidFill>
                 <a:latin typeface="Plus Jakarta Sans"/>
               </a:rPr>
@@ -3436,7 +3436,7 @@
             <a:r>
               <a:rPr sz="1300" b="0">
                 <a:solidFill>
-                  <a:srgbClr val="6E6A73"/>
+                  <a:srgbClr val="1B1B1F"/>
                 </a:solidFill>
                 <a:latin typeface="Plus Jakarta Sans"/>
               </a:rPr>
@@ -3471,7 +3471,7 @@
             <a:r>
               <a:rPr sz="1300" b="0">
                 <a:solidFill>
-                  <a:srgbClr val="6E6A73"/>
+                  <a:srgbClr val="1B1B1F"/>
                 </a:solidFill>
                 <a:latin typeface="Plus Jakarta Sans"/>
               </a:rPr>
@@ -3506,7 +3506,7 @@
             <a:r>
               <a:rPr sz="1300" b="0">
                 <a:solidFill>
-                  <a:srgbClr val="6E6A73"/>
+                  <a:srgbClr val="1B1B1F"/>
                 </a:solidFill>
                 <a:latin typeface="Plus Jakarta Sans"/>
               </a:rPr>
@@ -3541,7 +3541,7 @@
             <a:r>
               <a:rPr sz="1300" b="0">
                 <a:solidFill>
-                  <a:srgbClr val="6E6A73"/>
+                  <a:srgbClr val="1B1B1F"/>
                 </a:solidFill>
                 <a:latin typeface="Plus Jakarta Sans"/>
               </a:rPr>
@@ -3576,7 +3576,7 @@
             <a:r>
               <a:rPr sz="1300" b="0">
                 <a:solidFill>
-                  <a:srgbClr val="6E6A73"/>
+                  <a:srgbClr val="1B1B1F"/>
                 </a:solidFill>
                 <a:latin typeface="Plus Jakarta Sans"/>
               </a:rPr>
@@ -3611,7 +3611,7 @@
             <a:r>
               <a:rPr sz="1300" b="0">
                 <a:solidFill>
-                  <a:srgbClr val="6E6A73"/>
+                  <a:srgbClr val="1B1B1F"/>
                 </a:solidFill>
                 <a:latin typeface="Plus Jakarta Sans"/>
               </a:rPr>
@@ -3646,7 +3646,7 @@
             <a:r>
               <a:rPr sz="1300" b="0">
                 <a:solidFill>
-                  <a:srgbClr val="6E6A73"/>
+                  <a:srgbClr val="1B1B1F"/>
                 </a:solidFill>
                 <a:latin typeface="Plus Jakarta Sans"/>
               </a:rPr>
@@ -3681,7 +3681,7 @@
             <a:r>
               <a:rPr sz="1300" b="0">
                 <a:solidFill>
-                  <a:srgbClr val="6E6A73"/>
+                  <a:srgbClr val="1B1B1F"/>
                 </a:solidFill>
                 <a:latin typeface="Plus Jakarta Sans"/>
               </a:rPr>
@@ -3716,7 +3716,7 @@
             <a:r>
               <a:rPr sz="1300" b="0">
                 <a:solidFill>
-                  <a:srgbClr val="6E6A73"/>
+                  <a:srgbClr val="1B1B1F"/>
                 </a:solidFill>
                 <a:latin typeface="Plus Jakarta Sans"/>
               </a:rPr>
@@ -3751,7 +3751,7 @@
             <a:r>
               <a:rPr sz="1300" b="0">
                 <a:solidFill>
-                  <a:srgbClr val="6E6A73"/>
+                  <a:srgbClr val="1B1B1F"/>
                 </a:solidFill>
                 <a:latin typeface="Plus Jakarta Sans"/>
               </a:rPr>
@@ -3786,7 +3786,7 @@
             <a:r>
               <a:rPr sz="1300" b="0">
                 <a:solidFill>
-                  <a:srgbClr val="6E6A73"/>
+                  <a:srgbClr val="1B1B1F"/>
                 </a:solidFill>
                 <a:latin typeface="Plus Jakarta Sans"/>
               </a:rPr>
@@ -3821,7 +3821,7 @@
             <a:r>
               <a:rPr sz="1300" b="0">
                 <a:solidFill>
-                  <a:srgbClr val="6E6A73"/>
+                  <a:srgbClr val="1B1B1F"/>
                 </a:solidFill>
                 <a:latin typeface="Plus Jakarta Sans"/>
               </a:rPr>
@@ -11668,7 +11668,7 @@
             <a:r>
               <a:rPr sz="1100" b="0">
                 <a:solidFill>
-                  <a:srgbClr val="6E6A73"/>
+                  <a:srgbClr val="1B1B1F"/>
                 </a:solidFill>
                 <a:latin typeface="Recursive Mono"/>
               </a:rPr>
@@ -11703,7 +11703,7 @@
             <a:r>
               <a:rPr sz="1100" b="0">
                 <a:solidFill>
-                  <a:srgbClr val="6E6A73"/>
+                  <a:srgbClr val="1B1B1F"/>
                 </a:solidFill>
                 <a:latin typeface="Recursive Mono"/>
               </a:rPr>
